--- a/新任講習/out/01_1限_警備業務実施の基本原則.pptx
+++ b/新任講習/out/01_1限_警備業務実施の基本原則.pptx
@@ -5497,7 +5497,7 @@
                 <a:ea typeface="Yu Gothic" pitchFamily="34" charset="-122"/>
                 <a:cs typeface="Yu Gothic" pitchFamily="34" charset="-120"/>
               </a:rPr>
-              <a:t>・逃げる相手を追わない。追跡は有形力に発展しやすい</a:t>
+              <a:t>・逃げる相手を追わない。追跡の先で相手に触れれば有形力になる</a:t>
             </a:r>
             <a:endParaRPr lang="en-US" sz="1400" dirty="0"/>
           </a:p>
@@ -5520,7 +5520,7 @@
                 <a:ea typeface="Calibri" pitchFamily="34" charset="-122"/>
                 <a:cs typeface="Calibri" pitchFamily="34" charset="-120"/>
               </a:rPr>
-              <a:t>Do not chase someone who runs. Pursuit escalates into force</a:t>
+              <a:t>Do not chase. If the chase ends in you touching them, that is force</a:t>
             </a:r>
             <a:endParaRPr lang="en-US" sz="1400" dirty="0"/>
           </a:p>
@@ -6716,7 +6716,7 @@
                 <a:ea typeface="Yu Gothic" pitchFamily="34" charset="-122"/>
                 <a:cs typeface="Yu Gothic" pitchFamily="34" charset="-120"/>
               </a:rPr>
-              <a:t>・Reputation：クライアント企業の信用。応対品質が直接効く</a:t>
+              <a:t>・Reputation：クライアント企業の信用。来訪者が最初に接するのは警備員である</a:t>
             </a:r>
             <a:endParaRPr lang="en-US" sz="1400" dirty="0"/>
           </a:p>
@@ -6739,7 +6739,7 @@
                 <a:ea typeface="Calibri" pitchFamily="34" charset="-122"/>
                 <a:cs typeface="Calibri" pitchFamily="34" charset="-120"/>
               </a:rPr>
-              <a:t>Reputation: the client's standing. Your conduct affects it directly</a:t>
+              <a:t>Reputation: the client's standing. A visitor's first contact is the guard</a:t>
             </a:r>
             <a:endParaRPr lang="en-US" sz="1400" dirty="0"/>
           </a:p>
@@ -12311,7 +12311,7 @@
                 <a:ea typeface="Yu Gothic" pitchFamily="34" charset="-122"/>
                 <a:cs typeface="Yu Gothic" pitchFamily="34" charset="-120"/>
               </a:rPr>
-              <a:t>警備業法、警察庁「警備員教育」</a:t>
+              <a:t>警備業法、警察庁「警備員教育」、架空シナリオ</a:t>
             </a:r>
             <a:endParaRPr lang="en-US" sz="750" dirty="0"/>
           </a:p>
@@ -13051,7 +13051,7 @@
                 <a:ea typeface="Yu Gothic" pitchFamily="34" charset="-122"/>
                 <a:cs typeface="Yu Gothic" pitchFamily="34" charset="-120"/>
               </a:rPr>
-              <a:t>扱えない。捜査の権限はなく、書面を預かれば相手の手続きを遅らせることになる。</a:t>
+              <a:t>扱えない。被害届を受理するのは警察である。警備員が預かる根拠がない。</a:t>
             </a:r>
             <a:endParaRPr lang="en-US" sz="1150" dirty="0"/>
           </a:p>
@@ -13071,7 +13071,7 @@
                 <a:ea typeface="Calibri" pitchFamily="34" charset="-122"/>
                 <a:cs typeface="Calibri" pitchFamily="34" charset="-120"/>
               </a:rPr>
-              <a:t>No. A guard has no investigative power, and holding a document would only delay her own process.</a:t>
+              <a:t>No. Reports are received by the police. A guard has no basis for holding one.</a:t>
             </a:r>
             <a:endParaRPr lang="en-US" sz="1150" dirty="0"/>
           </a:p>
@@ -16207,7 +16207,7 @@
                 <a:ea typeface="Yu Gothic" pitchFamily="34" charset="-122"/>
                 <a:cs typeface="Yu Gothic" pitchFamily="34" charset="-120"/>
               </a:rPr>
-              <a:t>警備業法、刑法、刑事訴訟法、警察官職務執行法</a:t>
+              <a:t>警備業法、刑法、刑事訴訟法、警察官職務執行法、架空シナリオ</a:t>
             </a:r>
             <a:endParaRPr lang="en-US" sz="750" dirty="0"/>
           </a:p>
@@ -17228,7 +17228,7 @@
                 <a:ea typeface="Yu Gothic" pitchFamily="34" charset="-122"/>
                 <a:cs typeface="Yu Gothic" pitchFamily="34" charset="-120"/>
               </a:rPr>
-              <a:t>同席も加担になりうる。立ち会わず、その場で上長へ連絡する。</a:t>
+              <a:t>立ち会わない。実施の場に加わらず、その場で上長へ連絡する。</a:t>
             </a:r>
             <a:endParaRPr lang="en-US" sz="1050" dirty="0"/>
           </a:p>
@@ -17248,7 +17248,7 @@
                 <a:ea typeface="Calibri" pitchFamily="34" charset="-122"/>
                 <a:cs typeface="Calibri" pitchFamily="34" charset="-120"/>
               </a:rPr>
-              <a:t>Standing by can still make you a participant. Do not attend; call your supervisor there and then.</a:t>
+              <a:t>Do not attend. Stay out of the process itself, and call your supervisor there and then.</a:t>
             </a:r>
             <a:endParaRPr lang="en-US" sz="1050" dirty="0"/>
           </a:p>
@@ -18442,7 +18442,7 @@
                 <a:ea typeface="Yu Gothic" pitchFamily="34" charset="-122"/>
                 <a:cs typeface="Yu Gothic" pitchFamily="34" charset="-120"/>
               </a:rPr>
-              <a:t>第2時限 ― その土台の上に、警備員に求められる資質と品格を置きます。</a:t>
+              <a:t>第2時限 ― 続いて、警備員に求められる資質と品格を扱います。</a:t>
             </a:r>
             <a:endParaRPr lang="en-US" sz="1200" dirty="0"/>
           </a:p>
@@ -18459,7 +18459,7 @@
                 <a:ea typeface="Calibri" pitchFamily="34" charset="-122"/>
                 <a:cs typeface="Calibri" pitchFamily="34" charset="-120"/>
               </a:rPr>
-              <a:t>Period 2 — on that foundation, the qualities expected of an officer.</a:t>
+              <a:t>Period 2 — next, the qualities and conduct expected of an officer.</a:t>
             </a:r>
             <a:endParaRPr lang="en-US" sz="1200" dirty="0"/>
           </a:p>
@@ -22181,7 +22181,7 @@
                 <a:ea typeface="Yu Gothic" pitchFamily="34" charset="-122"/>
                 <a:cs typeface="Yu Gothic" pitchFamily="34" charset="-120"/>
               </a:rPr>
-              <a:t>・当時は業務を規律する法律がなく、質にばらつきがあった</a:t>
+              <a:t>・1972年まで、警備業務を規律する法律はなかった</a:t>
             </a:r>
             <a:endParaRPr lang="en-US" sz="1400" dirty="0"/>
           </a:p>
@@ -22204,7 +22204,7 @@
                 <a:ea typeface="Calibri" pitchFamily="34" charset="-122"/>
                 <a:cs typeface="Calibri" pitchFamily="34" charset="-120"/>
               </a:rPr>
-              <a:t>No law regulated the work at the time, and quality varied widely</a:t>
+              <a:t>Until 1972 there was no law regulating security work</a:t>
             </a:r>
             <a:endParaRPr lang="en-US" sz="1400" dirty="0"/>
           </a:p>
@@ -22484,7 +22484,7 @@
                 <a:ea typeface="Yu Gothic" pitchFamily="34" charset="-122"/>
                 <a:cs typeface="Yu Gothic" pitchFamily="34" charset="-120"/>
               </a:rPr>
-              <a:t>・条文の多くは「やってはいけないこと」を定めている</a:t>
+              <a:t>・第15条は、特別な権限を与えるものではないと明記している</a:t>
             </a:r>
             <a:endParaRPr lang="en-US" sz="1400" dirty="0"/>
           </a:p>
@@ -22507,7 +22507,7 @@
                 <a:ea typeface="Calibri" pitchFamily="34" charset="-122"/>
                 <a:cs typeface="Calibri" pitchFamily="34" charset="-120"/>
               </a:rPr>
-              <a:t>Much of the Act defines what must not be done</a:t>
+              <a:t>Article 15 states expressly that the Act confers no special authority</a:t>
             </a:r>
             <a:endParaRPr lang="en-US" sz="1400" dirty="0"/>
           </a:p>

--- a/新任講習/out/01_1限_警備業務実施の基本原則.pptx
+++ b/新任講習/out/01_1限_警備業務実施の基本原則.pptx
@@ -3293,12 +3293,12 @@
                 <a:spcPct val="94000"/>
               </a:lnSpc>
               <a:spcAft>
-                <a:spcPts val="300"/>
+                <a:spcPts val="200"/>
               </a:spcAft>
               <a:buNone/>
             </a:pPr>
             <a:r>
-              <a:rPr lang="en-US" sz="1500" b="1" dirty="0">
+              <a:rPr lang="en-US" sz="1300" b="1" dirty="0">
                 <a:solidFill>
                   <a:srgbClr val="1B2733"/>
                 </a:solidFill>
@@ -3308,7 +3308,7 @@
               </a:rPr>
               <a:t>・職務質問（第2条）</a:t>
             </a:r>
-            <a:endParaRPr lang="en-US" sz="1500" dirty="0"/>
+            <a:endParaRPr lang="en-US" sz="1300" dirty="0"/>
           </a:p>
           <a:p>
             <a:pPr indent="0" marL="0">
@@ -3316,12 +3316,12 @@
                 <a:spcPct val="94000"/>
               </a:lnSpc>
               <a:spcAft>
-                <a:spcPts val="300"/>
+                <a:spcPts val="200"/>
               </a:spcAft>
               <a:buNone/>
             </a:pPr>
             <a:r>
-              <a:rPr lang="en-US" sz="1500" dirty="0">
+              <a:rPr lang="en-US" sz="1300" dirty="0">
                 <a:solidFill>
                   <a:srgbClr val="1B2733"/>
                 </a:solidFill>
@@ -3331,7 +3331,7 @@
               </a:rPr>
               <a:t>Stop and question a person (Art. 2)</a:t>
             </a:r>
-            <a:endParaRPr lang="en-US" sz="1500" dirty="0"/>
+            <a:endParaRPr lang="en-US" sz="1300" dirty="0"/>
           </a:p>
           <a:p>
             <a:pPr indent="0" marL="0">
@@ -3339,12 +3339,12 @@
                 <a:spcPct val="94000"/>
               </a:lnSpc>
               <a:spcAft>
-                <a:spcPts val="300"/>
+                <a:spcPts val="200"/>
               </a:spcAft>
               <a:buNone/>
             </a:pPr>
             <a:r>
-              <a:rPr lang="en-US" sz="1500" b="1" dirty="0">
+              <a:rPr lang="en-US" sz="1300" b="1" dirty="0">
                 <a:solidFill>
                   <a:srgbClr val="1B2733"/>
                 </a:solidFill>
@@ -3354,7 +3354,7 @@
               </a:rPr>
               <a:t>・保護（第3条）、避難等の措置（第4条）</a:t>
             </a:r>
-            <a:endParaRPr lang="en-US" sz="1500" dirty="0"/>
+            <a:endParaRPr lang="en-US" sz="1300" dirty="0"/>
           </a:p>
           <a:p>
             <a:pPr indent="0" marL="0">
@@ -3362,12 +3362,12 @@
                 <a:spcPct val="94000"/>
               </a:lnSpc>
               <a:spcAft>
-                <a:spcPts val="300"/>
+                <a:spcPts val="200"/>
               </a:spcAft>
               <a:buNone/>
             </a:pPr>
             <a:r>
-              <a:rPr lang="en-US" sz="1500" dirty="0">
+              <a:rPr lang="en-US" sz="1300" dirty="0">
                 <a:solidFill>
                   <a:srgbClr val="1B2733"/>
                 </a:solidFill>
@@ -3377,7 +3377,7 @@
               </a:rPr>
               <a:t>Protective custody (Art. 3). Order evacuation (Art. 4)</a:t>
             </a:r>
-            <a:endParaRPr lang="en-US" sz="1500" dirty="0"/>
+            <a:endParaRPr lang="en-US" sz="1300" dirty="0"/>
           </a:p>
           <a:p>
             <a:pPr indent="0" marL="0">
@@ -3385,12 +3385,12 @@
                 <a:spcPct val="94000"/>
               </a:lnSpc>
               <a:spcAft>
-                <a:spcPts val="300"/>
+                <a:spcPts val="200"/>
               </a:spcAft>
               <a:buNone/>
             </a:pPr>
             <a:r>
-              <a:rPr lang="en-US" sz="1500" b="1" dirty="0">
+              <a:rPr lang="en-US" sz="1300" b="1" dirty="0">
                 <a:solidFill>
                   <a:srgbClr val="1B2733"/>
                 </a:solidFill>
@@ -3400,7 +3400,7 @@
               </a:rPr>
               <a:t>・犯罪の予防及び制止（第5条）</a:t>
             </a:r>
-            <a:endParaRPr lang="en-US" sz="1500" dirty="0"/>
+            <a:endParaRPr lang="en-US" sz="1300" dirty="0"/>
           </a:p>
           <a:p>
             <a:pPr indent="0" marL="0">
@@ -3408,12 +3408,12 @@
                 <a:spcPct val="94000"/>
               </a:lnSpc>
               <a:spcAft>
-                <a:spcPts val="300"/>
+                <a:spcPts val="200"/>
               </a:spcAft>
               <a:buNone/>
             </a:pPr>
             <a:r>
-              <a:rPr lang="en-US" sz="1500" dirty="0">
+              <a:rPr lang="en-US" sz="1300" dirty="0">
                 <a:solidFill>
                   <a:srgbClr val="1B2733"/>
                 </a:solidFill>
@@ -3423,7 +3423,7 @@
               </a:rPr>
               <a:t>Prevent and stop a crime (Art. 5)</a:t>
             </a:r>
-            <a:endParaRPr lang="en-US" sz="1500" dirty="0"/>
+            <a:endParaRPr lang="en-US" sz="1300" dirty="0"/>
           </a:p>
           <a:p>
             <a:pPr indent="0" marL="0">
@@ -3431,12 +3431,12 @@
                 <a:spcPct val="94000"/>
               </a:lnSpc>
               <a:spcAft>
-                <a:spcPts val="300"/>
+                <a:spcPts val="200"/>
               </a:spcAft>
               <a:buNone/>
             </a:pPr>
             <a:r>
-              <a:rPr lang="en-US" sz="1500" b="1" dirty="0">
+              <a:rPr lang="en-US" sz="1300" b="1" dirty="0">
                 <a:solidFill>
                   <a:srgbClr val="1B2733"/>
                 </a:solidFill>
@@ -3446,7 +3446,7 @@
               </a:rPr>
               <a:t>・立入（第6条）、武器の使用（第7条）</a:t>
             </a:r>
-            <a:endParaRPr lang="en-US" sz="1500" dirty="0"/>
+            <a:endParaRPr lang="en-US" sz="1300" dirty="0"/>
           </a:p>
           <a:p>
             <a:pPr indent="0" marL="0">
@@ -3454,12 +3454,12 @@
                 <a:spcPct val="94000"/>
               </a:lnSpc>
               <a:spcAft>
-                <a:spcPts val="300"/>
+                <a:spcPts val="200"/>
               </a:spcAft>
               <a:buNone/>
             </a:pPr>
             <a:r>
-              <a:rPr lang="en-US" sz="1500" dirty="0">
+              <a:rPr lang="en-US" sz="1300" dirty="0">
                 <a:solidFill>
                   <a:srgbClr val="1B2733"/>
                 </a:solidFill>
@@ -3469,7 +3469,7 @@
               </a:rPr>
               <a:t>Enter premises (Art. 6). Use weapons (Art. 7)</a:t>
             </a:r>
-            <a:endParaRPr lang="en-US" sz="1500" dirty="0"/>
+            <a:endParaRPr lang="en-US" sz="1300" dirty="0"/>
           </a:p>
           <a:p>
             <a:pPr indent="0" marL="0">
@@ -3477,12 +3477,12 @@
                 <a:spcPct val="94000"/>
               </a:lnSpc>
               <a:spcAft>
-                <a:spcPts val="300"/>
+                <a:spcPts val="200"/>
               </a:spcAft>
               <a:buNone/>
             </a:pPr>
             <a:r>
-              <a:rPr lang="en-US" sz="1500" b="1" dirty="0">
+              <a:rPr lang="en-US" sz="1300" b="1" dirty="0">
                 <a:solidFill>
                   <a:srgbClr val="1B2733"/>
                 </a:solidFill>
@@ -3492,7 +3492,7 @@
               </a:rPr>
               <a:t>・逮捕状による逮捕、取り調べ</a:t>
             </a:r>
-            <a:endParaRPr lang="en-US" sz="1500" dirty="0"/>
+            <a:endParaRPr lang="en-US" sz="1300" dirty="0"/>
           </a:p>
           <a:p>
             <a:pPr indent="0" marL="0">
@@ -3500,12 +3500,12 @@
                 <a:spcPct val="94000"/>
               </a:lnSpc>
               <a:spcAft>
-                <a:spcPts val="300"/>
+                <a:spcPts val="200"/>
               </a:spcAft>
               <a:buNone/>
             </a:pPr>
             <a:r>
-              <a:rPr lang="en-US" sz="1500" dirty="0">
+              <a:rPr lang="en-US" sz="1300" dirty="0">
                 <a:solidFill>
                   <a:srgbClr val="1B2733"/>
                 </a:solidFill>
@@ -3515,7 +3515,7 @@
               </a:rPr>
               <a:t>Arrest by warrant. Interrogation</a:t>
             </a:r>
-            <a:endParaRPr lang="en-US" sz="1500" dirty="0"/>
+            <a:endParaRPr lang="en-US" sz="1300" dirty="0"/>
           </a:p>
         </p:txBody>
       </p:sp>
@@ -3629,12 +3629,12 @@
                 <a:spcPct val="94000"/>
               </a:lnSpc>
               <a:spcAft>
-                <a:spcPts val="300"/>
+                <a:spcPts val="200"/>
               </a:spcAft>
               <a:buNone/>
             </a:pPr>
             <a:r>
-              <a:rPr lang="en-US" sz="1500" b="1" dirty="0">
+              <a:rPr lang="en-US" sz="1300" b="1" dirty="0">
                 <a:solidFill>
                   <a:srgbClr val="1B2733"/>
                 </a:solidFill>
@@ -3644,7 +3644,7 @@
               </a:rPr>
               <a:t>・左の権限は、いずれもありません</a:t>
             </a:r>
-            <a:endParaRPr lang="en-US" sz="1500" dirty="0"/>
+            <a:endParaRPr lang="en-US" sz="1300" dirty="0"/>
           </a:p>
           <a:p>
             <a:pPr indent="0" marL="0">
@@ -3652,12 +3652,12 @@
                 <a:spcPct val="94000"/>
               </a:lnSpc>
               <a:spcAft>
-                <a:spcPts val="300"/>
+                <a:spcPts val="200"/>
               </a:spcAft>
               <a:buNone/>
             </a:pPr>
             <a:r>
-              <a:rPr lang="en-US" sz="1500" dirty="0">
+              <a:rPr lang="en-US" sz="1300" dirty="0">
                 <a:solidFill>
                   <a:srgbClr val="1B2733"/>
                 </a:solidFill>
@@ -3667,7 +3667,7 @@
               </a:rPr>
               <a:t>None of the powers on the left</a:t>
             </a:r>
-            <a:endParaRPr lang="en-US" sz="1500" dirty="0"/>
+            <a:endParaRPr lang="en-US" sz="1300" dirty="0"/>
           </a:p>
           <a:p>
             <a:pPr indent="0" marL="0">
@@ -3675,12 +3675,12 @@
                 <a:spcPct val="94000"/>
               </a:lnSpc>
               <a:spcAft>
-                <a:spcPts val="300"/>
+                <a:spcPts val="200"/>
               </a:spcAft>
               <a:buNone/>
             </a:pPr>
             <a:r>
-              <a:rPr lang="en-US" sz="1500" b="1" dirty="0">
+              <a:rPr lang="en-US" sz="1300" b="1" dirty="0">
                 <a:solidFill>
                   <a:srgbClr val="1B2733"/>
                 </a:solidFill>
@@ -3690,7 +3690,7 @@
               </a:rPr>
               <a:t>・現行犯逮捕（刑訴法213条）― 誰でもできる</a:t>
             </a:r>
-            <a:endParaRPr lang="en-US" sz="1500" dirty="0"/>
+            <a:endParaRPr lang="en-US" sz="1300" dirty="0"/>
           </a:p>
           <a:p>
             <a:pPr indent="0" marL="0">
@@ -3698,12 +3698,12 @@
                 <a:spcPct val="94000"/>
               </a:lnSpc>
               <a:spcAft>
-                <a:spcPts val="300"/>
+                <a:spcPts val="200"/>
               </a:spcAft>
               <a:buNone/>
             </a:pPr>
             <a:r>
-              <a:rPr lang="en-US" sz="1500" dirty="0">
+              <a:rPr lang="en-US" sz="1300" dirty="0">
                 <a:solidFill>
                   <a:srgbClr val="1B2733"/>
                 </a:solidFill>
@@ -3713,7 +3713,7 @@
               </a:rPr>
               <a:t>Arrest of a flagrant offender — anyone may do this</a:t>
             </a:r>
-            <a:endParaRPr lang="en-US" sz="1500" dirty="0"/>
+            <a:endParaRPr lang="en-US" sz="1300" dirty="0"/>
           </a:p>
           <a:p>
             <a:pPr indent="0" marL="0">
@@ -3721,12 +3721,12 @@
                 <a:spcPct val="94000"/>
               </a:lnSpc>
               <a:spcAft>
-                <a:spcPts val="300"/>
+                <a:spcPts val="200"/>
               </a:spcAft>
               <a:buNone/>
             </a:pPr>
             <a:r>
-              <a:rPr lang="en-US" sz="1500" b="1" dirty="0">
+              <a:rPr lang="en-US" sz="1300" b="1" dirty="0">
                 <a:solidFill>
                   <a:srgbClr val="1B2733"/>
                 </a:solidFill>
@@ -3736,7 +3736,7 @@
               </a:rPr>
               <a:t>・正当防衛（刑法36条）、緊急避難（37条）― 誰でもできる</a:t>
             </a:r>
-            <a:endParaRPr lang="en-US" sz="1500" dirty="0"/>
+            <a:endParaRPr lang="en-US" sz="1300" dirty="0"/>
           </a:p>
           <a:p>
             <a:pPr indent="0" marL="0">
@@ -3744,12 +3744,12 @@
                 <a:spcPct val="94000"/>
               </a:lnSpc>
               <a:spcAft>
-                <a:spcPts val="300"/>
+                <a:spcPts val="200"/>
               </a:spcAft>
               <a:buNone/>
             </a:pPr>
             <a:r>
-              <a:rPr lang="en-US" sz="1500" dirty="0">
+              <a:rPr lang="en-US" sz="1300" dirty="0">
                 <a:solidFill>
                   <a:srgbClr val="1B2733"/>
                 </a:solidFill>
@@ -3759,7 +3759,7 @@
               </a:rPr>
               <a:t>Self-defence and necessity — anyone may do this</a:t>
             </a:r>
-            <a:endParaRPr lang="en-US" sz="1500" dirty="0"/>
+            <a:endParaRPr lang="en-US" sz="1300" dirty="0"/>
           </a:p>
           <a:p>
             <a:pPr indent="0" marL="0">
@@ -3767,12 +3767,12 @@
                 <a:spcPct val="94000"/>
               </a:lnSpc>
               <a:spcAft>
-                <a:spcPts val="300"/>
+                <a:spcPts val="200"/>
               </a:spcAft>
               <a:buNone/>
             </a:pPr>
             <a:r>
-              <a:rPr lang="en-US" sz="1500" b="1" dirty="0">
+              <a:rPr lang="en-US" sz="1300" b="1" dirty="0">
                 <a:solidFill>
                   <a:srgbClr val="1B2733"/>
                 </a:solidFill>
@@ -3782,7 +3782,7 @@
               </a:rPr>
               <a:t>・管理権者から委ねられた範囲</a:t>
             </a:r>
-            <a:endParaRPr lang="en-US" sz="1500" dirty="0"/>
+            <a:endParaRPr lang="en-US" sz="1300" dirty="0"/>
           </a:p>
           <a:p>
             <a:pPr indent="0" marL="0">
@@ -3790,12 +3790,12 @@
                 <a:spcPct val="94000"/>
               </a:lnSpc>
               <a:spcAft>
-                <a:spcPts val="300"/>
+                <a:spcPts val="200"/>
               </a:spcAft>
               <a:buNone/>
             </a:pPr>
             <a:r>
-              <a:rPr lang="en-US" sz="1500" dirty="0">
+              <a:rPr lang="en-US" sz="1300" dirty="0">
                 <a:solidFill>
                   <a:srgbClr val="1B2733"/>
                 </a:solidFill>
@@ -3805,7 +3805,7 @@
               </a:rPr>
               <a:t>What the site authority has delegated</a:t>
             </a:r>
-            <a:endParaRPr lang="en-US" sz="1500" dirty="0"/>
+            <a:endParaRPr lang="en-US" sz="1300" dirty="0"/>
           </a:p>
           <a:p>
             <a:pPr indent="0" marL="0">
@@ -3813,12 +3813,12 @@
                 <a:spcPct val="94000"/>
               </a:lnSpc>
               <a:spcAft>
-                <a:spcPts val="300"/>
+                <a:spcPts val="200"/>
               </a:spcAft>
               <a:buNone/>
             </a:pPr>
             <a:r>
-              <a:rPr lang="en-US" sz="1500" b="1" dirty="0">
+              <a:rPr lang="en-US" sz="1300" b="1" dirty="0">
                 <a:solidFill>
                   <a:srgbClr val="1B2733"/>
                 </a:solidFill>
@@ -3828,7 +3828,7 @@
               </a:rPr>
               <a:t>・その範囲は契約と警備指令書で決まります</a:t>
             </a:r>
-            <a:endParaRPr lang="en-US" sz="1500" dirty="0"/>
+            <a:endParaRPr lang="en-US" sz="1300" dirty="0"/>
           </a:p>
           <a:p>
             <a:pPr indent="0" marL="0">
@@ -3836,12 +3836,12 @@
                 <a:spcPct val="94000"/>
               </a:lnSpc>
               <a:spcAft>
-                <a:spcPts val="300"/>
+                <a:spcPts val="200"/>
               </a:spcAft>
               <a:buNone/>
             </a:pPr>
             <a:r>
-              <a:rPr lang="en-US" sz="1500" dirty="0">
+              <a:rPr lang="en-US" sz="1300" dirty="0">
                 <a:solidFill>
                   <a:srgbClr val="1B2733"/>
                 </a:solidFill>
@@ -3851,7 +3851,7 @@
               </a:rPr>
               <a:t>That scope is set by the contract and the post orders</a:t>
             </a:r>
-            <a:endParaRPr lang="en-US" sz="1500" dirty="0"/>
+            <a:endParaRPr lang="en-US" sz="1300" dirty="0"/>
           </a:p>
         </p:txBody>
       </p:sp>
@@ -11220,11 +11220,11 @@
         <p:spPr>
           <a:xfrm>
             <a:off x="640080" y="1115568"/>
-            <a:ext cx="10911535" cy="1124712"/>
+            <a:ext cx="10911535" cy="1600200"/>
           </a:xfrm>
           <a:prstGeom prst="roundRect">
             <a:avLst>
-              <a:gd name="adj" fmla="val 3252"/>
+              <a:gd name="adj" fmla="val 2286"/>
             </a:avLst>
           </a:prstGeom>
           <a:solidFill>
@@ -11242,7 +11242,7 @@
         <p:spPr>
           <a:xfrm>
             <a:off x="950976" y="1243584"/>
-            <a:ext cx="10289743" cy="868680"/>
+            <a:ext cx="10289743" cy="1344168"/>
           </a:xfrm>
           <a:prstGeom prst="rect">
             <a:avLst/>
@@ -11340,7 +11340,7 @@
         </p:nvSpPr>
         <p:spPr>
           <a:xfrm>
-            <a:off x="640080" y="2386584"/>
+            <a:off x="640080" y="2862072"/>
             <a:ext cx="10911535" cy="566928"/>
           </a:xfrm>
           <a:prstGeom prst="rect">
@@ -11419,12 +11419,12 @@
         </p:nvSpPr>
         <p:spPr>
           <a:xfrm>
-            <a:off x="640080" y="3008376"/>
-            <a:ext cx="5327752" cy="900684"/>
+            <a:off x="640080" y="3483864"/>
+            <a:ext cx="5327752" cy="662940"/>
           </a:xfrm>
           <a:prstGeom prst="roundRect">
             <a:avLst>
-              <a:gd name="adj" fmla="val 4061"/>
+              <a:gd name="adj" fmla="val 5517"/>
             </a:avLst>
           </a:prstGeom>
           <a:solidFill>
@@ -11441,7 +11441,7 @@
         </p:nvSpPr>
         <p:spPr>
           <a:xfrm>
-            <a:off x="804672" y="3312414"/>
+            <a:off x="804672" y="3669030"/>
             <a:ext cx="292608" cy="292608"/>
           </a:xfrm>
           <a:prstGeom prst="ellipse">
@@ -11461,7 +11461,7 @@
         </p:nvSpPr>
         <p:spPr>
           <a:xfrm>
-            <a:off x="804672" y="3312414"/>
+            <a:off x="804672" y="3669030"/>
             <a:ext cx="292608" cy="292608"/>
           </a:xfrm>
           <a:prstGeom prst="rect">
@@ -11500,8 +11500,8 @@
         </p:nvSpPr>
         <p:spPr>
           <a:xfrm>
-            <a:off x="1188720" y="3063240"/>
-            <a:ext cx="4596232" cy="790956"/>
+            <a:off x="1188720" y="3538728"/>
+            <a:ext cx="4596232" cy="553212"/>
           </a:xfrm>
           <a:prstGeom prst="rect">
             <a:avLst/>
@@ -11562,12 +11562,12 @@
         </p:nvSpPr>
         <p:spPr>
           <a:xfrm>
-            <a:off x="6223864" y="3008376"/>
-            <a:ext cx="5327752" cy="900684"/>
+            <a:off x="6223864" y="3483864"/>
+            <a:ext cx="5327752" cy="662940"/>
           </a:xfrm>
           <a:prstGeom prst="roundRect">
             <a:avLst>
-              <a:gd name="adj" fmla="val 4061"/>
+              <a:gd name="adj" fmla="val 5517"/>
             </a:avLst>
           </a:prstGeom>
           <a:solidFill>
@@ -11584,7 +11584,7 @@
         </p:nvSpPr>
         <p:spPr>
           <a:xfrm>
-            <a:off x="6388456" y="3312414"/>
+            <a:off x="6388456" y="3669030"/>
             <a:ext cx="292608" cy="292608"/>
           </a:xfrm>
           <a:prstGeom prst="ellipse">
@@ -11604,7 +11604,7 @@
         </p:nvSpPr>
         <p:spPr>
           <a:xfrm>
-            <a:off x="6388456" y="3312414"/>
+            <a:off x="6388456" y="3669030"/>
             <a:ext cx="292608" cy="292608"/>
           </a:xfrm>
           <a:prstGeom prst="rect">
@@ -11643,8 +11643,8 @@
         </p:nvSpPr>
         <p:spPr>
           <a:xfrm>
-            <a:off x="6772504" y="3063240"/>
-            <a:ext cx="4596232" cy="790956"/>
+            <a:off x="6772504" y="3538728"/>
+            <a:ext cx="4596232" cy="553212"/>
           </a:xfrm>
           <a:prstGeom prst="rect">
             <a:avLst/>
@@ -11705,12 +11705,12 @@
         </p:nvSpPr>
         <p:spPr>
           <a:xfrm>
-            <a:off x="640080" y="4018788"/>
-            <a:ext cx="5327752" cy="900684"/>
+            <a:off x="640080" y="4256532"/>
+            <a:ext cx="5327752" cy="662940"/>
           </a:xfrm>
           <a:prstGeom prst="roundRect">
             <a:avLst>
-              <a:gd name="adj" fmla="val 4061"/>
+              <a:gd name="adj" fmla="val 5517"/>
             </a:avLst>
           </a:prstGeom>
           <a:solidFill>
@@ -11727,7 +11727,7 @@
         </p:nvSpPr>
         <p:spPr>
           <a:xfrm>
-            <a:off x="804672" y="4322826"/>
+            <a:off x="804672" y="4441698"/>
             <a:ext cx="292608" cy="292608"/>
           </a:xfrm>
           <a:prstGeom prst="ellipse">
@@ -11747,7 +11747,7 @@
         </p:nvSpPr>
         <p:spPr>
           <a:xfrm>
-            <a:off x="804672" y="4322826"/>
+            <a:off x="804672" y="4441698"/>
             <a:ext cx="292608" cy="292608"/>
           </a:xfrm>
           <a:prstGeom prst="rect">
@@ -11786,8 +11786,8 @@
         </p:nvSpPr>
         <p:spPr>
           <a:xfrm>
-            <a:off x="1188720" y="4073652"/>
-            <a:ext cx="4596232" cy="790956"/>
+            <a:off x="1188720" y="4311396"/>
+            <a:ext cx="4596232" cy="553212"/>
           </a:xfrm>
           <a:prstGeom prst="rect">
             <a:avLst/>
@@ -11848,12 +11848,12 @@
         </p:nvSpPr>
         <p:spPr>
           <a:xfrm>
-            <a:off x="6223864" y="4018788"/>
-            <a:ext cx="5327752" cy="900684"/>
+            <a:off x="6223864" y="4256532"/>
+            <a:ext cx="5327752" cy="662940"/>
           </a:xfrm>
           <a:prstGeom prst="roundRect">
             <a:avLst>
-              <a:gd name="adj" fmla="val 4061"/>
+              <a:gd name="adj" fmla="val 5517"/>
             </a:avLst>
           </a:prstGeom>
           <a:solidFill>
@@ -11870,7 +11870,7 @@
         </p:nvSpPr>
         <p:spPr>
           <a:xfrm>
-            <a:off x="6388456" y="4322826"/>
+            <a:off x="6388456" y="4441698"/>
             <a:ext cx="292608" cy="292608"/>
           </a:xfrm>
           <a:prstGeom prst="ellipse">
@@ -11890,7 +11890,7 @@
         </p:nvSpPr>
         <p:spPr>
           <a:xfrm>
-            <a:off x="6388456" y="4322826"/>
+            <a:off x="6388456" y="4441698"/>
             <a:ext cx="292608" cy="292608"/>
           </a:xfrm>
           <a:prstGeom prst="rect">
@@ -11929,8 +11929,8 @@
         </p:nvSpPr>
         <p:spPr>
           <a:xfrm>
-            <a:off x="6772504" y="4073652"/>
-            <a:ext cx="4596232" cy="790956"/>
+            <a:off x="6772504" y="4311396"/>
+            <a:ext cx="4596232" cy="553212"/>
           </a:xfrm>
           <a:prstGeom prst="rect">
             <a:avLst/>
@@ -15116,11 +15116,11 @@
         <p:spPr>
           <a:xfrm>
             <a:off x="640080" y="1115568"/>
-            <a:ext cx="10911535" cy="1124712"/>
+            <a:ext cx="10911535" cy="1600200"/>
           </a:xfrm>
           <a:prstGeom prst="roundRect">
             <a:avLst>
-              <a:gd name="adj" fmla="val 3252"/>
+              <a:gd name="adj" fmla="val 2286"/>
             </a:avLst>
           </a:prstGeom>
           <a:solidFill>
@@ -15138,7 +15138,7 @@
         <p:spPr>
           <a:xfrm>
             <a:off x="950976" y="1243584"/>
-            <a:ext cx="10289743" cy="868680"/>
+            <a:ext cx="10289743" cy="1344168"/>
           </a:xfrm>
           <a:prstGeom prst="rect">
             <a:avLst/>
@@ -15236,7 +15236,7 @@
         </p:nvSpPr>
         <p:spPr>
           <a:xfrm>
-            <a:off x="640080" y="2386584"/>
+            <a:off x="640080" y="2862072"/>
             <a:ext cx="10911535" cy="566928"/>
           </a:xfrm>
           <a:prstGeom prst="rect">
@@ -15315,12 +15315,12 @@
         </p:nvSpPr>
         <p:spPr>
           <a:xfrm>
-            <a:off x="640080" y="3008376"/>
-            <a:ext cx="5327752" cy="900684"/>
+            <a:off x="640080" y="3483864"/>
+            <a:ext cx="5327752" cy="662940"/>
           </a:xfrm>
           <a:prstGeom prst="roundRect">
             <a:avLst>
-              <a:gd name="adj" fmla="val 4061"/>
+              <a:gd name="adj" fmla="val 5517"/>
             </a:avLst>
           </a:prstGeom>
           <a:solidFill>
@@ -15337,7 +15337,7 @@
         </p:nvSpPr>
         <p:spPr>
           <a:xfrm>
-            <a:off x="804672" y="3312414"/>
+            <a:off x="804672" y="3669030"/>
             <a:ext cx="292608" cy="292608"/>
           </a:xfrm>
           <a:prstGeom prst="ellipse">
@@ -15357,7 +15357,7 @@
         </p:nvSpPr>
         <p:spPr>
           <a:xfrm>
-            <a:off x="804672" y="3312414"/>
+            <a:off x="804672" y="3669030"/>
             <a:ext cx="292608" cy="292608"/>
           </a:xfrm>
           <a:prstGeom prst="rect">
@@ -15396,8 +15396,8 @@
         </p:nvSpPr>
         <p:spPr>
           <a:xfrm>
-            <a:off x="1188720" y="3063240"/>
-            <a:ext cx="4596232" cy="790956"/>
+            <a:off x="1188720" y="3538728"/>
+            <a:ext cx="4596232" cy="553212"/>
           </a:xfrm>
           <a:prstGeom prst="rect">
             <a:avLst/>
@@ -15458,12 +15458,12 @@
         </p:nvSpPr>
         <p:spPr>
           <a:xfrm>
-            <a:off x="6223864" y="3008376"/>
-            <a:ext cx="5327752" cy="900684"/>
+            <a:off x="6223864" y="3483864"/>
+            <a:ext cx="5327752" cy="662940"/>
           </a:xfrm>
           <a:prstGeom prst="roundRect">
             <a:avLst>
-              <a:gd name="adj" fmla="val 4061"/>
+              <a:gd name="adj" fmla="val 5517"/>
             </a:avLst>
           </a:prstGeom>
           <a:solidFill>
@@ -15480,7 +15480,7 @@
         </p:nvSpPr>
         <p:spPr>
           <a:xfrm>
-            <a:off x="6388456" y="3312414"/>
+            <a:off x="6388456" y="3669030"/>
             <a:ext cx="292608" cy="292608"/>
           </a:xfrm>
           <a:prstGeom prst="ellipse">
@@ -15500,7 +15500,7 @@
         </p:nvSpPr>
         <p:spPr>
           <a:xfrm>
-            <a:off x="6388456" y="3312414"/>
+            <a:off x="6388456" y="3669030"/>
             <a:ext cx="292608" cy="292608"/>
           </a:xfrm>
           <a:prstGeom prst="rect">
@@ -15539,8 +15539,8 @@
         </p:nvSpPr>
         <p:spPr>
           <a:xfrm>
-            <a:off x="6772504" y="3063240"/>
-            <a:ext cx="4596232" cy="790956"/>
+            <a:off x="6772504" y="3538728"/>
+            <a:ext cx="4596232" cy="553212"/>
           </a:xfrm>
           <a:prstGeom prst="rect">
             <a:avLst/>
@@ -15601,12 +15601,12 @@
         </p:nvSpPr>
         <p:spPr>
           <a:xfrm>
-            <a:off x="640080" y="4018788"/>
-            <a:ext cx="5327752" cy="900684"/>
+            <a:off x="640080" y="4256532"/>
+            <a:ext cx="5327752" cy="662940"/>
           </a:xfrm>
           <a:prstGeom prst="roundRect">
             <a:avLst>
-              <a:gd name="adj" fmla="val 4061"/>
+              <a:gd name="adj" fmla="val 5517"/>
             </a:avLst>
           </a:prstGeom>
           <a:solidFill>
@@ -15623,7 +15623,7 @@
         </p:nvSpPr>
         <p:spPr>
           <a:xfrm>
-            <a:off x="804672" y="4322826"/>
+            <a:off x="804672" y="4441698"/>
             <a:ext cx="292608" cy="292608"/>
           </a:xfrm>
           <a:prstGeom prst="ellipse">
@@ -15643,7 +15643,7 @@
         </p:nvSpPr>
         <p:spPr>
           <a:xfrm>
-            <a:off x="804672" y="4322826"/>
+            <a:off x="804672" y="4441698"/>
             <a:ext cx="292608" cy="292608"/>
           </a:xfrm>
           <a:prstGeom prst="rect">
@@ -15682,8 +15682,8 @@
         </p:nvSpPr>
         <p:spPr>
           <a:xfrm>
-            <a:off x="1188720" y="4073652"/>
-            <a:ext cx="4596232" cy="790956"/>
+            <a:off x="1188720" y="4311396"/>
+            <a:ext cx="4596232" cy="553212"/>
           </a:xfrm>
           <a:prstGeom prst="rect">
             <a:avLst/>
@@ -15744,12 +15744,12 @@
         </p:nvSpPr>
         <p:spPr>
           <a:xfrm>
-            <a:off x="6223864" y="4018788"/>
-            <a:ext cx="5327752" cy="900684"/>
+            <a:off x="6223864" y="4256532"/>
+            <a:ext cx="5327752" cy="662940"/>
           </a:xfrm>
           <a:prstGeom prst="roundRect">
             <a:avLst>
-              <a:gd name="adj" fmla="val 4061"/>
+              <a:gd name="adj" fmla="val 5517"/>
             </a:avLst>
           </a:prstGeom>
           <a:solidFill>
@@ -15766,7 +15766,7 @@
         </p:nvSpPr>
         <p:spPr>
           <a:xfrm>
-            <a:off x="6388456" y="4322826"/>
+            <a:off x="6388456" y="4441698"/>
             <a:ext cx="292608" cy="292608"/>
           </a:xfrm>
           <a:prstGeom prst="ellipse">
@@ -15786,7 +15786,7 @@
         </p:nvSpPr>
         <p:spPr>
           <a:xfrm>
-            <a:off x="6388456" y="4322826"/>
+            <a:off x="6388456" y="4441698"/>
             <a:ext cx="292608" cy="292608"/>
           </a:xfrm>
           <a:prstGeom prst="rect">
@@ -15825,8 +15825,8 @@
         </p:nvSpPr>
         <p:spPr>
           <a:xfrm>
-            <a:off x="6772504" y="4073652"/>
-            <a:ext cx="4596232" cy="790956"/>
+            <a:off x="6772504" y="4311396"/>
+            <a:ext cx="4596232" cy="553212"/>
           </a:xfrm>
           <a:prstGeom prst="rect">
             <a:avLst/>
